--- a/linear-algebra/matrix-multiplication/MatrixMultiplication.pptx
+++ b/linear-algebra/matrix-multiplication/MatrixMultiplication.pptx
@@ -16,6 +16,7 @@
     <p:sldId id="264" r:id="rId10"/>
     <p:sldId id="265" r:id="rId11"/>
     <p:sldId id="266" r:id="rId12"/>
+    <p:sldId id="267" r:id="rId13"/>
   </p:sldIdLst>
   <p:sldSz cx="12192000" cy="6858000"/>
   <p:notesSz cx="6858000" cy="9144000"/>
@@ -115,6 +116,11 @@
       </a:defRPr>
     </a:lvl9pPr>
   </p:defaultTextStyle>
+  <p:extLst>
+    <p:ext uri="{EFAFB233-063F-42B5-8137-9DF3F51BA10A}">
+      <p15:sldGuideLst xmlns:p15="http://schemas.microsoft.com/office/powerpoint/2012/main"/>
+    </p:ext>
+  </p:extLst>
 </p:presentation>
 </file>
 
@@ -3540,6 +3546,72 @@
     <p:extLst>
       <p:ext uri="{BB962C8B-B14F-4D97-AF65-F5344CB8AC3E}">
         <p14:creationId xmlns:p14="http://schemas.microsoft.com/office/powerpoint/2010/main" val="420831955"/>
+      </p:ext>
+    </p:extLst>
+  </p:cSld>
+  <p:clrMapOvr>
+    <a:masterClrMapping/>
+  </p:clrMapOvr>
+</p:sld>
+</file>
+
+<file path=ppt/slides/slide12.xml><?xml version="1.0" encoding="utf-8"?>
+<p:sld xmlns:a="http://schemas.openxmlformats.org/drawingml/2006/main" xmlns:r="http://schemas.openxmlformats.org/officeDocument/2006/relationships" xmlns:p="http://schemas.openxmlformats.org/presentationml/2006/main">
+  <p:cSld>
+    <p:spTree>
+      <p:nvGrpSpPr>
+        <p:cNvPr id="1" name=""/>
+        <p:cNvGrpSpPr/>
+        <p:nvPr/>
+      </p:nvGrpSpPr>
+      <p:grpSpPr>
+        <a:xfrm>
+          <a:off x="0" y="0"/>
+          <a:ext cx="0" cy="0"/>
+          <a:chOff x="0" y="0"/>
+          <a:chExt cx="0" cy="0"/>
+        </a:xfrm>
+      </p:grpSpPr>
+      <p:pic>
+        <p:nvPicPr>
+          <p:cNvPr id="3" name="Afbeelding 2">
+            <a:extLst>
+              <a:ext uri="{FF2B5EF4-FFF2-40B4-BE49-F238E27FC236}">
+                <a16:creationId xmlns:a16="http://schemas.microsoft.com/office/drawing/2014/main" id="{D7BF6477-4EFA-E489-E47D-5E4139C4D9A8}"/>
+              </a:ext>
+            </a:extLst>
+          </p:cNvPr>
+          <p:cNvPicPr>
+            <a:picLocks noChangeAspect="1"/>
+          </p:cNvPicPr>
+          <p:nvPr/>
+        </p:nvPicPr>
+        <p:blipFill>
+          <a:blip r:embed="rId2">
+            <a:extLst>
+              <a:ext uri="{28A0092B-C50C-407E-A947-70E740481C1C}">
+                <a14:useLocalDpi xmlns:a14="http://schemas.microsoft.com/office/drawing/2010/main" val="0"/>
+              </a:ext>
+            </a:extLst>
+          </a:blip>
+          <a:stretch>
+            <a:fillRect/>
+          </a:stretch>
+        </p:blipFill>
+        <p:spPr>
+          <a:xfrm>
+            <a:off x="0" y="195943"/>
+            <a:ext cx="12192000" cy="6357257"/>
+          </a:xfrm>
+          <a:prstGeom prst="rect">
+            <a:avLst/>
+          </a:prstGeom>
+        </p:spPr>
+      </p:pic>
+    </p:spTree>
+    <p:extLst>
+      <p:ext uri="{BB962C8B-B14F-4D97-AF65-F5344CB8AC3E}">
+        <p14:creationId xmlns:p14="http://schemas.microsoft.com/office/powerpoint/2010/main" val="2561590018"/>
       </p:ext>
     </p:extLst>
   </p:cSld>

--- a/linear-algebra/matrix-multiplication/MatrixMultiplication.pptx
+++ b/linear-algebra/matrix-multiplication/MatrixMultiplication.pptx
@@ -3574,10 +3574,10 @@
       </p:grpSpPr>
       <p:pic>
         <p:nvPicPr>
-          <p:cNvPr id="3" name="Afbeelding 2">
-            <a:extLst>
-              <a:ext uri="{FF2B5EF4-FFF2-40B4-BE49-F238E27FC236}">
-                <a16:creationId xmlns:a16="http://schemas.microsoft.com/office/drawing/2014/main" id="{D7BF6477-4EFA-E489-E47D-5E4139C4D9A8}"/>
+          <p:cNvPr id="5" name="Afbeelding 4">
+            <a:extLst>
+              <a:ext uri="{FF2B5EF4-FFF2-40B4-BE49-F238E27FC236}">
+                <a16:creationId xmlns:a16="http://schemas.microsoft.com/office/drawing/2014/main" id="{1946CF85-D09A-F4D8-E22F-4478BEA1FABC}"/>
               </a:ext>
             </a:extLst>
           </p:cNvPr>
@@ -3600,8 +3600,8 @@
         </p:blipFill>
         <p:spPr>
           <a:xfrm>
-            <a:off x="0" y="195943"/>
-            <a:ext cx="12192000" cy="6357257"/>
+            <a:off x="0" y="402771"/>
+            <a:ext cx="12192000" cy="6183085"/>
           </a:xfrm>
           <a:prstGeom prst="rect">
             <a:avLst/>

--- a/linear-algebra/matrix-multiplication/MatrixMultiplication.pptx
+++ b/linear-algebra/matrix-multiplication/MatrixMultiplication.pptx
@@ -271,7 +271,7 @@
           <a:p>
             <a:fld id="{B01B4580-D49F-4B54-A64B-CA6EAD794C50}" type="datetimeFigureOut">
               <a:rPr lang="nl-NL" smtClean="0"/>
-              <a:t>17-9-2026</a:t>
+              <a:t>22-9-2026</a:t>
             </a:fld>
             <a:endParaRPr lang="nl-NL"/>
           </a:p>
@@ -469,7 +469,7 @@
           <a:p>
             <a:fld id="{B01B4580-D49F-4B54-A64B-CA6EAD794C50}" type="datetimeFigureOut">
               <a:rPr lang="nl-NL" smtClean="0"/>
-              <a:t>17-9-2026</a:t>
+              <a:t>22-9-2026</a:t>
             </a:fld>
             <a:endParaRPr lang="nl-NL"/>
           </a:p>
@@ -677,7 +677,7 @@
           <a:p>
             <a:fld id="{B01B4580-D49F-4B54-A64B-CA6EAD794C50}" type="datetimeFigureOut">
               <a:rPr lang="nl-NL" smtClean="0"/>
-              <a:t>17-9-2026</a:t>
+              <a:t>22-9-2026</a:t>
             </a:fld>
             <a:endParaRPr lang="nl-NL"/>
           </a:p>
@@ -875,7 +875,7 @@
           <a:p>
             <a:fld id="{B01B4580-D49F-4B54-A64B-CA6EAD794C50}" type="datetimeFigureOut">
               <a:rPr lang="nl-NL" smtClean="0"/>
-              <a:t>17-9-2026</a:t>
+              <a:t>22-9-2026</a:t>
             </a:fld>
             <a:endParaRPr lang="nl-NL"/>
           </a:p>
@@ -1150,7 +1150,7 @@
           <a:p>
             <a:fld id="{B01B4580-D49F-4B54-A64B-CA6EAD794C50}" type="datetimeFigureOut">
               <a:rPr lang="nl-NL" smtClean="0"/>
-              <a:t>17-9-2026</a:t>
+              <a:t>22-9-2026</a:t>
             </a:fld>
             <a:endParaRPr lang="nl-NL"/>
           </a:p>
@@ -1415,7 +1415,7 @@
           <a:p>
             <a:fld id="{B01B4580-D49F-4B54-A64B-CA6EAD794C50}" type="datetimeFigureOut">
               <a:rPr lang="nl-NL" smtClean="0"/>
-              <a:t>17-9-2026</a:t>
+              <a:t>22-9-2026</a:t>
             </a:fld>
             <a:endParaRPr lang="nl-NL"/>
           </a:p>
@@ -1827,7 +1827,7 @@
           <a:p>
             <a:fld id="{B01B4580-D49F-4B54-A64B-CA6EAD794C50}" type="datetimeFigureOut">
               <a:rPr lang="nl-NL" smtClean="0"/>
-              <a:t>17-9-2026</a:t>
+              <a:t>22-9-2026</a:t>
             </a:fld>
             <a:endParaRPr lang="nl-NL"/>
           </a:p>
@@ -1968,7 +1968,7 @@
           <a:p>
             <a:fld id="{B01B4580-D49F-4B54-A64B-CA6EAD794C50}" type="datetimeFigureOut">
               <a:rPr lang="nl-NL" smtClean="0"/>
-              <a:t>17-9-2026</a:t>
+              <a:t>22-9-2026</a:t>
             </a:fld>
             <a:endParaRPr lang="nl-NL"/>
           </a:p>
@@ -2081,7 +2081,7 @@
           <a:p>
             <a:fld id="{B01B4580-D49F-4B54-A64B-CA6EAD794C50}" type="datetimeFigureOut">
               <a:rPr lang="nl-NL" smtClean="0"/>
-              <a:t>17-9-2026</a:t>
+              <a:t>22-9-2026</a:t>
             </a:fld>
             <a:endParaRPr lang="nl-NL"/>
           </a:p>
@@ -2392,7 +2392,7 @@
           <a:p>
             <a:fld id="{B01B4580-D49F-4B54-A64B-CA6EAD794C50}" type="datetimeFigureOut">
               <a:rPr lang="nl-NL" smtClean="0"/>
-              <a:t>17-9-2026</a:t>
+              <a:t>22-9-2026</a:t>
             </a:fld>
             <a:endParaRPr lang="nl-NL"/>
           </a:p>
@@ -2680,7 +2680,7 @@
           <a:p>
             <a:fld id="{B01B4580-D49F-4B54-A64B-CA6EAD794C50}" type="datetimeFigureOut">
               <a:rPr lang="nl-NL" smtClean="0"/>
-              <a:t>17-9-2026</a:t>
+              <a:t>22-9-2026</a:t>
             </a:fld>
             <a:endParaRPr lang="nl-NL"/>
           </a:p>
@@ -2921,7 +2921,7 @@
           <a:p>
             <a:fld id="{B01B4580-D49F-4B54-A64B-CA6EAD794C50}" type="datetimeFigureOut">
               <a:rPr lang="nl-NL" smtClean="0"/>
-              <a:t>17-9-2026</a:t>
+              <a:t>22-9-2026</a:t>
             </a:fld>
             <a:endParaRPr lang="nl-NL"/>
           </a:p>
@@ -3574,10 +3574,10 @@
       </p:grpSpPr>
       <p:pic>
         <p:nvPicPr>
-          <p:cNvPr id="5" name="Afbeelding 4">
-            <a:extLst>
-              <a:ext uri="{FF2B5EF4-FFF2-40B4-BE49-F238E27FC236}">
-                <a16:creationId xmlns:a16="http://schemas.microsoft.com/office/drawing/2014/main" id="{1946CF85-D09A-F4D8-E22F-4478BEA1FABC}"/>
+          <p:cNvPr id="6" name="Afbeelding 5">
+            <a:extLst>
+              <a:ext uri="{FF2B5EF4-FFF2-40B4-BE49-F238E27FC236}">
+                <a16:creationId xmlns:a16="http://schemas.microsoft.com/office/drawing/2014/main" id="{2D7F30B1-8594-3FB5-E595-D9A9A7B0D22A}"/>
               </a:ext>
             </a:extLst>
           </p:cNvPr>
@@ -3600,8 +3600,8 @@
         </p:blipFill>
         <p:spPr>
           <a:xfrm>
-            <a:off x="0" y="402771"/>
-            <a:ext cx="12192000" cy="6183085"/>
+            <a:off x="0" y="457199"/>
+            <a:ext cx="12191999" cy="5965371"/>
           </a:xfrm>
           <a:prstGeom prst="rect">
             <a:avLst/>
